--- a/Nhom9_BaoCaoCuoiKy_SLIDE.pptx
+++ b/Nhom9_BaoCaoCuoiKy_SLIDE.pptx
@@ -2641,21 +2641,43 @@
           </a:bodyPr>
           <a:lstStyle/>
           <a:p>
-            <a:pPr marL="0" lvl="0" indent="0" algn="l" rtl="0">
-              <a:spcBef>
-                <a:spcPts val="0"/>
-              </a:spcBef>
-              <a:spcAft>
-                <a:spcPts val="0"/>
-              </a:spcAft>
-              <a:buSzPts val="1400"/>
-              <a:buNone/>
-            </a:pPr>
-            <a:r>
-              <a:rPr lang="en-US"/>
-              <a:t>Trong mỗi giai đoạn của kiến trúc Retrieve-Rewrite-Answer nhóm cũng đã thêm mã giả và prompt nhóm xài trong bài toán.</a:t>
-            </a:r>
-            <a:endParaRPr/>
+            <a:pPr algn="l"/>
+            <a:r>
+              <a:rPr lang="en-US" b="0" i="0" u="none" strike="noStrike" dirty="0">
+                <a:solidFill>
+                  <a:srgbClr val="000000"/>
+                </a:solidFill>
+                <a:effectLst/>
+              </a:rPr>
+              <a:t>The model frequently misclassifies 'Good' instances as 'Standard', indicating a potential over-</a:t>
+            </a:r>
+            <a:r>
+              <a:rPr lang="en-US" b="0" i="0" u="none" strike="noStrike" dirty="0" err="1">
+                <a:solidFill>
+                  <a:srgbClr val="000000"/>
+                </a:solidFill>
+                <a:effectLst/>
+              </a:rPr>
+              <a:t>generalisation</a:t>
+            </a:r>
+            <a:r>
+              <a:rPr lang="en-US" b="0" i="0" u="none" strike="noStrike" dirty="0">
+                <a:solidFill>
+                  <a:srgbClr val="000000"/>
+                </a:solidFill>
+                <a:effectLst/>
+              </a:rPr>
+              <a:t> for the 'Standard' class at the expense of 'Good' samples. </a:t>
+            </a:r>
+            <a:r>
+              <a:rPr lang="en-US" b="0" i="0" u="none" strike="noStrike">
+                <a:solidFill>
+                  <a:srgbClr val="000000"/>
+                </a:solidFill>
+                <a:effectLst/>
+              </a:rPr>
+              <a:t>Similarly, 'Poor' instances are often mistaken for 'Standard', suggesting an area for targeted improvement.</a:t>
+            </a:r>
           </a:p>
         </p:txBody>
       </p:sp>
@@ -43139,8 +43161,8 @@
         </p:nvSpPr>
         <p:spPr>
           <a:xfrm>
-            <a:off x="2452895" y="334309"/>
-            <a:ext cx="7720500" cy="1446509"/>
+            <a:off x="2421364" y="189659"/>
+            <a:ext cx="7720500" cy="769401"/>
           </a:xfrm>
           <a:prstGeom prst="rect">
             <a:avLst/>
@@ -43163,7 +43185,7 @@
                   <a:srgbClr val="1B09FF"/>
                 </a:solidFill>
               </a:rPr>
-              <a:t>THIẾT KẾ BỘ SUY DIỄN (INFERENCE ENGINE) </a:t>
+              <a:t>THIẾT KẾ BỘ SUY DIỄN</a:t>
             </a:r>
             <a:endParaRPr dirty="0"/>
           </a:p>
@@ -44108,6 +44130,66 @@
           </a:p>
         </p:txBody>
       </p:sp>
+      <p:pic>
+        <p:nvPicPr>
+          <p:cNvPr id="3" name="Picture 2">
+            <a:extLst>
+              <a:ext uri="{FF2B5EF4-FFF2-40B4-BE49-F238E27FC236}">
+                <a16:creationId xmlns:a16="http://schemas.microsoft.com/office/drawing/2014/main" id="{3B467C29-636D-8CAA-D46F-C978E02E441A}"/>
+              </a:ext>
+            </a:extLst>
+          </p:cNvPr>
+          <p:cNvPicPr>
+            <a:picLocks noChangeAspect="1"/>
+          </p:cNvPicPr>
+          <p:nvPr/>
+        </p:nvPicPr>
+        <p:blipFill>
+          <a:blip r:embed="rId5"/>
+          <a:stretch>
+            <a:fillRect/>
+          </a:stretch>
+        </p:blipFill>
+        <p:spPr>
+          <a:xfrm>
+            <a:off x="2682342" y="1480017"/>
+            <a:ext cx="9272477" cy="2094329"/>
+          </a:xfrm>
+          <a:prstGeom prst="rect">
+            <a:avLst/>
+          </a:prstGeom>
+        </p:spPr>
+      </p:pic>
+      <p:pic>
+        <p:nvPicPr>
+          <p:cNvPr id="4" name="Picture 3">
+            <a:extLst>
+              <a:ext uri="{FF2B5EF4-FFF2-40B4-BE49-F238E27FC236}">
+                <a16:creationId xmlns:a16="http://schemas.microsoft.com/office/drawing/2014/main" id="{647B8576-2110-858F-736D-CC0BC9195DD4}"/>
+              </a:ext>
+            </a:extLst>
+          </p:cNvPr>
+          <p:cNvPicPr>
+            <a:picLocks noChangeAspect="1"/>
+          </p:cNvPicPr>
+          <p:nvPr/>
+        </p:nvPicPr>
+        <p:blipFill>
+          <a:blip r:embed="rId6"/>
+          <a:stretch>
+            <a:fillRect/>
+          </a:stretch>
+        </p:blipFill>
+        <p:spPr>
+          <a:xfrm>
+            <a:off x="6510603" y="4017954"/>
+            <a:ext cx="3694941" cy="2050489"/>
+          </a:xfrm>
+          <a:prstGeom prst="rect">
+            <a:avLst/>
+          </a:prstGeom>
+        </p:spPr>
+      </p:pic>
     </p:spTree>
   </p:cSld>
   <p:clrMapOvr>
